--- a/presentations/C2_BDA_PPT.pptx
+++ b/presentations/C2_BDA_PPT.pptx
@@ -184,11 +184,6 @@
             <c:idx val="0"/>
             <c:invertIfNegative val="0"/>
             <c:bubble3D val="0"/>
-            <c:spPr>
-              <a:solidFill>
-                <a:srgbClr val="1C2B4A"/>
-              </a:solidFill>
-            </c:spPr>
             <c:extLst>
               <c:ext xmlns:c16="http://schemas.microsoft.com/office/drawing/2014/chart" uri="{C3380CC4-5D6E-409C-BE32-E72D297353CC}">
                 <c16:uniqueId val="{00000001-F9D8-4E19-B11E-DF17E11E6D61}"/>
@@ -199,11 +194,6 @@
             <c:idx val="1"/>
             <c:invertIfNegative val="0"/>
             <c:bubble3D val="0"/>
-            <c:spPr>
-              <a:solidFill>
-                <a:srgbClr val="1C2B4A"/>
-              </a:solidFill>
-            </c:spPr>
             <c:extLst>
               <c:ext xmlns:c16="http://schemas.microsoft.com/office/drawing/2014/chart" uri="{C3380CC4-5D6E-409C-BE32-E72D297353CC}">
                 <c16:uniqueId val="{00000003-F9D8-4E19-B11E-DF17E11E6D61}"/>
@@ -4960,7 +4950,7 @@
               </a:defRPr>
             </a:pPr>
             <a:r>
-              <a:rPr sz="1950" i="0">
+              <a:rPr sz="1950" i="0" dirty="0">
                 <a:solidFill>
                   <a:srgbClr val="1A1A1A"/>
                 </a:solidFill>
@@ -4970,7 +4960,7 @@
               </a:rPr>
               <a:t>A claim receives an automated approve, reject or manual-review recommendation.</a:t>
             </a:r>
-            <a:endParaRPr sz="1400"/>
+            <a:endParaRPr sz="1400" dirty="0"/>
           </a:p>
         </p:txBody>
       </p:sp>
@@ -5069,7 +5059,7 @@
         </p:nvSpPr>
         <p:spPr>
           <a:xfrm>
-            <a:off x="6537960" y="1691640"/>
+            <a:off x="6537960" y="1701472"/>
             <a:ext cx="5074920" cy="2880360"/>
           </a:xfrm>
           <a:prstGeom prst="roundRect">
@@ -5421,6 +5411,17 @@
               </a:rPr>
               <a:t>The model could recover the simulator’s construction rule.</a:t>
             </a:r>
+            <a:r>
+              <a:rPr lang="en-US" sz="1800" i="0" dirty="0">
+                <a:solidFill>
+                  <a:srgbClr val="1A1A1A"/>
+                </a:solidFill>
+                <a:latin typeface="Calibri"/>
+                <a:ea typeface="Calibri"/>
+                <a:cs typeface="Calibri"/>
+              </a:rPr>
+              <a:t> </a:t>
+            </a:r>
             <a:endParaRPr sz="1150" dirty="0"/>
           </a:p>
         </p:txBody>
@@ -5555,29 +5556,10 @@
           <a:bodyPr wrap="square" anchor="ctr"/>
           <a:lstStyle/>
           <a:p>
-            <a:pPr marL="0" indent="0">
-              <a:lnSpc>
-                <a:spcPct val="115000"/>
-              </a:lnSpc>
-              <a:buNone/>
-              <a:defRPr sz="1650" i="0">
-                <a:latin typeface="Calibri"/>
-                <a:ea typeface="Calibri"/>
-                <a:cs typeface="Calibri"/>
-              </a:defRPr>
-            </a:pPr>
-            <a:r>
-              <a:rPr sz="1650" i="0" dirty="0">
-                <a:solidFill>
-                  <a:srgbClr val="1A1A1A"/>
-                </a:solidFill>
-                <a:latin typeface="Calibri"/>
-                <a:ea typeface="Calibri"/>
-                <a:cs typeface="Calibri"/>
-              </a:rPr>
-              <a:t>No verified outcomes, appeal process or live error-feedback loop. Reliability varies by district.</a:t>
-            </a:r>
-            <a:endParaRPr sz="1150" dirty="0"/>
+            <a:r>
+              <a:rPr lang="en-IN" sz="1600" dirty="0"/>
+              <a:t>Binding decisions could place the burden of correcting model errors on farmers. Reliability also varies with evidence quality.</a:t>
+            </a:r>
           </a:p>
         </p:txBody>
       </p:sp>
@@ -6194,6 +6176,28 @@
               </a:rPr>
               <a:t>Seasonal / annual</a:t>
             </a:r>
+            <a:r>
+              <a:rPr lang="en-US" sz="1800" i="0" dirty="0">
+                <a:solidFill>
+                  <a:srgbClr val="1A1A1A"/>
+                </a:solidFill>
+                <a:latin typeface="Calibri"/>
+                <a:ea typeface="Calibri"/>
+                <a:cs typeface="Calibri"/>
+              </a:rPr>
+              <a:t> </a:t>
+            </a:r>
+            <a:r>
+              <a:rPr lang="en-US" dirty="0">
+                <a:solidFill>
+                  <a:srgbClr val="1A1A1A"/>
+                </a:solidFill>
+                <a:latin typeface="Calibri"/>
+                <a:ea typeface="Calibri"/>
+                <a:cs typeface="Calibri"/>
+              </a:rPr>
+              <a:t>(historical)</a:t>
+            </a:r>
             <a:endParaRPr sz="1100" dirty="0"/>
           </a:p>
           <a:p>
@@ -6219,7 +6223,46 @@
               </a:rPr>
               <a:t>batch processing</a:t>
             </a:r>
-            <a:endParaRPr sz="1100" dirty="0"/>
+            <a:endParaRPr lang="en-US" dirty="0">
+              <a:solidFill>
+                <a:srgbClr val="1A1A1A"/>
+              </a:solidFill>
+              <a:latin typeface="Calibri"/>
+              <a:ea typeface="Calibri"/>
+              <a:cs typeface="Calibri"/>
+            </a:endParaRPr>
+          </a:p>
+          <a:p>
+            <a:pPr marL="0" indent="0" algn="ctr">
+              <a:lnSpc>
+                <a:spcPct val="120000"/>
+              </a:lnSpc>
+              <a:buNone/>
+              <a:defRPr sz="1800" i="0">
+                <a:latin typeface="Calibri"/>
+                <a:ea typeface="Calibri"/>
+                <a:cs typeface="Calibri"/>
+              </a:defRPr>
+            </a:pPr>
+            <a:r>
+              <a:rPr lang="en-IN" sz="1050" dirty="0">
+                <a:solidFill>
+                  <a:srgbClr val="1A1A1A"/>
+                </a:solidFill>
+                <a:latin typeface="Calibri"/>
+                <a:ea typeface="Calibri"/>
+                <a:cs typeface="Calibri"/>
+              </a:rPr>
+              <a:t>Live use could get latest API data</a:t>
+            </a:r>
+            <a:endParaRPr lang="en-IN" sz="1600" dirty="0">
+              <a:solidFill>
+                <a:srgbClr val="1A1A1A"/>
+              </a:solidFill>
+              <a:latin typeface="Calibri"/>
+              <a:ea typeface="Calibri"/>
+              <a:cs typeface="Calibri"/>
+            </a:endParaRPr>
           </a:p>
         </p:txBody>
       </p:sp>
@@ -6987,16 +7030,31 @@
               </a:defRPr>
             </a:pPr>
             <a:r>
-              <a:rPr sz="1800" dirty="0">
+              <a:rPr lang="en-IN" dirty="0">
                 <a:solidFill>
                   <a:srgbClr val="20463B"/>
                 </a:solidFill>
                 <a:latin typeface="Calibri"/>
-                <a:ea typeface="Calibri"/>
-                <a:cs typeface="Calibri"/>
-              </a:rPr>
-              <a:t>Both simulated losses and non-losses; no observed approval/rejection labels.</a:t>
-            </a:r>
+              </a:rPr>
+              <a:t>Both losses and non-losses are simulated; no verified claim-level loss outcomes were </a:t>
+            </a:r>
+            <a:r>
+              <a:rPr lang="en-IN" dirty="0" err="1">
+                <a:solidFill>
+                  <a:srgbClr val="20463B"/>
+                </a:solidFill>
+                <a:latin typeface="Calibri"/>
+              </a:rPr>
+              <a:t>available.x</a:t>
+            </a:r>
+            <a:endParaRPr sz="1800" dirty="0">
+              <a:solidFill>
+                <a:srgbClr val="20463B"/>
+              </a:solidFill>
+              <a:latin typeface="Calibri"/>
+              <a:ea typeface="Calibri"/>
+              <a:cs typeface="Calibri"/>
+            </a:endParaRPr>
           </a:p>
         </p:txBody>
       </p:sp>
@@ -12106,7 +12164,7 @@
               </a:defRPr>
             </a:pPr>
             <a:r>
-              <a:rPr sz="1725" b="1" i="0">
+              <a:rPr sz="1725" b="1" i="0" dirty="0">
                 <a:solidFill>
                   <a:srgbClr val="1C2B4A"/>
                 </a:solidFill>
@@ -12114,9 +12172,9 @@
                 <a:ea typeface="Calibri"/>
                 <a:cs typeface="Calibri"/>
               </a:rPr>
-              <a:t>Review capacity must reflect assessor availability. No production deployment is established.</a:t>
-            </a:r>
-            <a:endParaRPr sz="1150"/>
+              <a:t>Review capacity must reflect assessor availability.</a:t>
+            </a:r>
+            <a:endParaRPr sz="1150" dirty="0"/>
           </a:p>
         </p:txBody>
       </p:sp>
@@ -12152,7 +12210,7 @@
               <a:buNone/>
             </a:pPr>
             <a:r>
-              <a:rPr sz="1200" b="1" spc="100">
+              <a:rPr sz="1200" b="1" spc="100" dirty="0">
                 <a:solidFill>
                   <a:srgbClr val="C89B3C"/>
                 </a:solidFill>
@@ -12162,7 +12220,7 @@
               </a:rPr>
               <a:t>STAGED ADOPTION ROADMAP</a:t>
             </a:r>
-            <a:endParaRPr sz="1200"/>
+            <a:endParaRPr sz="1200" dirty="0"/>
           </a:p>
         </p:txBody>
       </p:sp>
@@ -12437,7 +12495,7 @@
               </a:defRPr>
             </a:pPr>
             <a:r>
-              <a:rPr sz="1875" b="1" i="0">
+              <a:rPr sz="1875" b="1" i="0" dirty="0">
                 <a:solidFill>
                   <a:srgbClr val="FFFFFF"/>
                 </a:solidFill>
@@ -12447,7 +12505,7 @@
               </a:rPr>
               <a:t>Measure Effort</a:t>
             </a:r>
-            <a:endParaRPr sz="1250"/>
+            <a:endParaRPr sz="1250" dirty="0"/>
           </a:p>
           <a:p>
             <a:pPr marL="0" indent="0">
@@ -12462,7 +12520,7 @@
               </a:defRPr>
             </a:pPr>
             <a:r>
-              <a:rPr sz="1875" b="1" i="0">
+              <a:rPr sz="1875" b="1" i="0" dirty="0">
                 <a:solidFill>
                   <a:srgbClr val="FFFFFF"/>
                 </a:solidFill>
@@ -12472,7 +12530,7 @@
               </a:rPr>
               <a:t>&amp; Outcomes</a:t>
             </a:r>
-            <a:endParaRPr sz="1250"/>
+            <a:endParaRPr sz="1250" dirty="0"/>
           </a:p>
         </p:txBody>
       </p:sp>
@@ -13029,8 +13087,8 @@
         </p:nvSpPr>
         <p:spPr>
           <a:xfrm>
-            <a:off x="548640" y="1691640"/>
-            <a:ext cx="3566160" cy="1481328"/>
+            <a:off x="1482710" y="1371194"/>
+            <a:ext cx="4000741" cy="1926937"/>
           </a:xfrm>
           <a:prstGeom prst="roundRect">
             <a:avLst>
@@ -13064,8 +13122,8 @@
         </p:nvSpPr>
         <p:spPr>
           <a:xfrm>
-            <a:off x="713232" y="1856232"/>
-            <a:ext cx="502920" cy="502920"/>
+            <a:off x="1647302" y="1531766"/>
+            <a:ext cx="564207" cy="655572"/>
           </a:xfrm>
           <a:prstGeom prst="ellipse">
             <a:avLst/>
@@ -13091,8 +13149,8 @@
         </p:blipFill>
         <p:spPr>
           <a:xfrm>
-            <a:off x="778612" y="1921612"/>
-            <a:ext cx="372161" cy="372161"/>
+            <a:off x="1712683" y="1597146"/>
+            <a:ext cx="485124" cy="485124"/>
           </a:xfrm>
           <a:prstGeom prst="rect">
             <a:avLst/>
@@ -13115,8 +13173,8 @@
         </p:nvSpPr>
         <p:spPr>
           <a:xfrm>
-            <a:off x="1325880" y="1819656"/>
-            <a:ext cx="2651760" cy="365760"/>
+            <a:off x="2259951" y="1495190"/>
+            <a:ext cx="2974910" cy="476780"/>
           </a:xfrm>
           <a:prstGeom prst="rect">
             <a:avLst/>
@@ -13136,7 +13194,7 @@
               </a:defRPr>
             </a:pPr>
             <a:r>
-              <a:rPr sz="1800" b="1" i="0">
+              <a:rPr lang="en-US" b="1" dirty="0">
                 <a:solidFill>
                   <a:srgbClr val="1A1A1A"/>
                 </a:solidFill>
@@ -13144,9 +13202,9 @@
                 <a:ea typeface="Calibri"/>
                 <a:cs typeface="Calibri"/>
               </a:rPr>
-              <a:t>Synthetic outcomes</a:t>
-            </a:r>
-            <a:endParaRPr sz="1200"/>
+              <a:t>No Ground Truth </a:t>
+            </a:r>
+            <a:endParaRPr sz="1200" dirty="0"/>
           </a:p>
         </p:txBody>
       </p:sp>
@@ -13166,8 +13224,8 @@
         </p:nvSpPr>
         <p:spPr>
           <a:xfrm>
-            <a:off x="1325880" y="2194560"/>
-            <a:ext cx="2651760" cy="868680"/>
+            <a:off x="2259951" y="1870094"/>
+            <a:ext cx="2974910" cy="1132352"/>
           </a:xfrm>
           <a:prstGeom prst="rect">
             <a:avLst/>
@@ -13190,7 +13248,7 @@
               </a:defRPr>
             </a:pPr>
             <a:r>
-              <a:rPr sz="1650" i="0" dirty="0">
+              <a:rPr lang="en-IN" sz="1650" i="0" dirty="0">
                 <a:solidFill>
                   <a:srgbClr val="6B6F6D"/>
                 </a:solidFill>
@@ -13198,7 +13256,29 @@
                 <a:ea typeface="Calibri"/>
                 <a:cs typeface="Calibri"/>
               </a:rPr>
-              <a:t>2M scenarios are not independent real observations.</a:t>
+              <a:t>Real</a:t>
+            </a:r>
+            <a:r>
+              <a:rPr lang="en-IN" sz="1650" dirty="0">
+                <a:solidFill>
+                  <a:srgbClr val="6B6F6D"/>
+                </a:solidFill>
+                <a:latin typeface="Calibri"/>
+                <a:ea typeface="Calibri"/>
+                <a:cs typeface="Calibri"/>
+              </a:rPr>
+              <a:t>-w</a:t>
+            </a:r>
+            <a:r>
+              <a:rPr lang="en-IN" sz="1650" i="0" dirty="0">
+                <a:solidFill>
+                  <a:srgbClr val="6B6F6D"/>
+                </a:solidFill>
+                <a:latin typeface="Calibri"/>
+                <a:ea typeface="Calibri"/>
+                <a:cs typeface="Calibri"/>
+              </a:rPr>
+              <a:t>orld model accuracy cannot be measured.</a:t>
             </a:r>
             <a:endParaRPr sz="1000" dirty="0"/>
           </a:p>
@@ -13220,8 +13300,8 @@
         </p:nvSpPr>
         <p:spPr>
           <a:xfrm>
-            <a:off x="4297680" y="1691640"/>
-            <a:ext cx="3566160" cy="1481328"/>
+            <a:off x="6519774" y="1332471"/>
+            <a:ext cx="4000743" cy="1930958"/>
           </a:xfrm>
           <a:prstGeom prst="roundRect">
             <a:avLst>
@@ -13255,8 +13335,8 @@
         </p:nvSpPr>
         <p:spPr>
           <a:xfrm>
-            <a:off x="4462272" y="1856232"/>
-            <a:ext cx="502920" cy="502920"/>
+            <a:off x="6684366" y="1636879"/>
+            <a:ext cx="564207" cy="655572"/>
           </a:xfrm>
           <a:prstGeom prst="ellipse">
             <a:avLst/>
@@ -13282,8 +13362,8 @@
         </p:blipFill>
         <p:spPr>
           <a:xfrm>
-            <a:off x="4527652" y="1921612"/>
-            <a:ext cx="372161" cy="372161"/>
+            <a:off x="6749747" y="1720945"/>
+            <a:ext cx="431941" cy="485123"/>
           </a:xfrm>
           <a:prstGeom prst="rect">
             <a:avLst/>
@@ -13306,8 +13386,8 @@
         </p:nvSpPr>
         <p:spPr>
           <a:xfrm>
-            <a:off x="5074920" y="1819656"/>
-            <a:ext cx="2651760" cy="365760"/>
+            <a:off x="7297014" y="1619903"/>
+            <a:ext cx="2974911" cy="476780"/>
           </a:xfrm>
           <a:prstGeom prst="rect">
             <a:avLst/>
@@ -13327,7 +13407,7 @@
               </a:defRPr>
             </a:pPr>
             <a:r>
-              <a:rPr sz="1800" b="1" i="0">
+              <a:rPr sz="1800" b="1" i="0" dirty="0">
                 <a:solidFill>
                   <a:srgbClr val="1A1A1A"/>
                 </a:solidFill>
@@ -13337,7 +13417,7 @@
               </a:rPr>
               <a:t>Context-level evidence</a:t>
             </a:r>
-            <a:endParaRPr sz="1200"/>
+            <a:endParaRPr sz="1200" dirty="0"/>
           </a:p>
         </p:txBody>
       </p:sp>
@@ -13357,8 +13437,8 @@
         </p:nvSpPr>
         <p:spPr>
           <a:xfrm>
-            <a:off x="5074920" y="2194560"/>
-            <a:ext cx="2651760" cy="868680"/>
+            <a:off x="7297014" y="1922939"/>
+            <a:ext cx="2974911" cy="1132352"/>
           </a:xfrm>
           <a:prstGeom prst="rect">
             <a:avLst/>
@@ -13411,8 +13491,8 @@
         </p:nvSpPr>
         <p:spPr>
           <a:xfrm>
-            <a:off x="8046720" y="1691640"/>
-            <a:ext cx="3566160" cy="1481328"/>
+            <a:off x="6571880" y="3441787"/>
+            <a:ext cx="3948637" cy="1919654"/>
           </a:xfrm>
           <a:prstGeom prst="roundRect">
             <a:avLst>
@@ -13446,8 +13526,8 @@
         </p:nvSpPr>
         <p:spPr>
           <a:xfrm>
-            <a:off x="8211312" y="1856232"/>
-            <a:ext cx="502920" cy="502920"/>
+            <a:off x="6736471" y="3606378"/>
+            <a:ext cx="564207" cy="654207"/>
           </a:xfrm>
           <a:prstGeom prst="ellipse">
             <a:avLst/>
@@ -13473,8 +13553,8 @@
         </p:blipFill>
         <p:spPr>
           <a:xfrm>
-            <a:off x="8276692" y="1921612"/>
-            <a:ext cx="372161" cy="372161"/>
+            <a:off x="6801852" y="3671759"/>
+            <a:ext cx="484113" cy="484113"/>
           </a:xfrm>
           <a:prstGeom prst="rect">
             <a:avLst/>
@@ -13497,8 +13577,8 @@
         </p:nvSpPr>
         <p:spPr>
           <a:xfrm>
-            <a:off x="8823960" y="1819656"/>
-            <a:ext cx="2651760" cy="365760"/>
+            <a:off x="7349119" y="3569802"/>
+            <a:ext cx="2974911" cy="475787"/>
           </a:xfrm>
           <a:prstGeom prst="rect">
             <a:avLst/>
@@ -13548,8 +13628,8 @@
         </p:nvSpPr>
         <p:spPr>
           <a:xfrm>
-            <a:off x="8823960" y="2194560"/>
-            <a:ext cx="2651760" cy="868680"/>
+            <a:off x="7349119" y="3944706"/>
+            <a:ext cx="2974911" cy="1129993"/>
           </a:xfrm>
           <a:prstGeom prst="rect">
             <a:avLst/>
@@ -13572,7 +13652,7 @@
               </a:defRPr>
             </a:pPr>
             <a:r>
-              <a:rPr sz="1650" i="0">
+              <a:rPr sz="1650" i="0" dirty="0">
                 <a:solidFill>
                   <a:srgbClr val="6B6F6D"/>
                 </a:solidFill>
@@ -13582,7 +13662,7 @@
               </a:rPr>
               <a:t>Engineering choices, uncalibrated to actual crop damage.</a:t>
             </a:r>
-            <a:endParaRPr sz="1000"/>
+            <a:endParaRPr sz="1000" dirty="0"/>
           </a:p>
         </p:txBody>
       </p:sp>
@@ -13602,8 +13682,8 @@
         </p:nvSpPr>
         <p:spPr>
           <a:xfrm>
-            <a:off x="548640" y="3355848"/>
-            <a:ext cx="3566160" cy="1481328"/>
+            <a:off x="1482707" y="3434505"/>
+            <a:ext cx="4000741" cy="1926936"/>
           </a:xfrm>
           <a:prstGeom prst="roundRect">
             <a:avLst>
@@ -13637,8 +13717,8 @@
         </p:nvSpPr>
         <p:spPr>
           <a:xfrm>
-            <a:off x="713232" y="3520440"/>
-            <a:ext cx="502920" cy="502920"/>
+            <a:off x="1647299" y="3599096"/>
+            <a:ext cx="564207" cy="654207"/>
           </a:xfrm>
           <a:prstGeom prst="ellipse">
             <a:avLst/>
@@ -13664,8 +13744,8 @@
         </p:blipFill>
         <p:spPr>
           <a:xfrm>
-            <a:off x="778612" y="3585820"/>
-            <a:ext cx="372161" cy="372161"/>
+            <a:off x="1712680" y="3664477"/>
+            <a:ext cx="484113" cy="484113"/>
           </a:xfrm>
           <a:prstGeom prst="rect">
             <a:avLst/>
@@ -13688,8 +13768,8 @@
         </p:nvSpPr>
         <p:spPr>
           <a:xfrm>
-            <a:off x="1325880" y="3483864"/>
-            <a:ext cx="2651760" cy="365760"/>
+            <a:off x="2259948" y="3562520"/>
+            <a:ext cx="2974910" cy="475787"/>
           </a:xfrm>
           <a:prstGeom prst="rect">
             <a:avLst/>
@@ -13709,7 +13789,7 @@
               </a:defRPr>
             </a:pPr>
             <a:r>
-              <a:rPr sz="1800" b="1" i="0">
+              <a:rPr lang="en-US" sz="1800" b="1" i="0" dirty="0">
                 <a:solidFill>
                   <a:srgbClr val="1A1A1A"/>
                 </a:solidFill>
@@ -13717,9 +13797,9 @@
                 <a:ea typeface="Calibri"/>
                 <a:cs typeface="Calibri"/>
               </a:rPr>
-              <a:t>Limited testing</a:t>
-            </a:r>
-            <a:endParaRPr sz="1200"/>
+              <a:t>Unequal evidence coverage</a:t>
+            </a:r>
+            <a:endParaRPr sz="1200" dirty="0"/>
           </a:p>
         </p:txBody>
       </p:sp>
@@ -13739,8 +13819,8 @@
         </p:nvSpPr>
         <p:spPr>
           <a:xfrm>
-            <a:off x="1325880" y="3858768"/>
-            <a:ext cx="2651760" cy="868680"/>
+            <a:off x="2259948" y="3937424"/>
+            <a:ext cx="2974910" cy="1129993"/>
           </a:xfrm>
           <a:prstGeom prst="rect">
             <a:avLst/>
@@ -13753,7 +13833,7 @@
           <a:p>
             <a:pPr marL="0" indent="0">
               <a:lnSpc>
-                <a:spcPct val="112000"/>
+                <a:spcPct val="100000"/>
               </a:lnSpc>
               <a:buNone/>
               <a:defRPr sz="1650" i="0">
@@ -13763,7 +13843,7 @@
               </a:defRPr>
             </a:pPr>
             <a:r>
-              <a:rPr sz="1650" i="0">
+              <a:rPr lang="en-US" sz="1650" i="0" dirty="0">
                 <a:solidFill>
                   <a:srgbClr val="6B6F6D"/>
                 </a:solidFill>
@@ -13771,391 +13851,9 @@
                 <a:ea typeface="Calibri"/>
                 <a:cs typeface="Calibri"/>
               </a:rPr>
-              <a:t>Other seeds, mechanisms and unseen districts are untested.</a:t>
-            </a:r>
-            <a:endParaRPr sz="1000"/>
-          </a:p>
-        </p:txBody>
-      </p:sp>
-      <p:sp>
-        <p:nvSpPr>
-          <p:cNvPr id="24" name="Shape 18">
-            <a:extLst>
-              <a:ext uri="{FF2B5EF4-FFF2-40B4-BE49-F238E27FC236}">
-                <a16:creationId xmlns:a16="http://schemas.microsoft.com/office/drawing/2014/main" id="{7A8CA7EF-6A65-4444-964B-B5AF8ECE10FE}"/>
-              </a:ext>
-            </a:extLst>
-          </p:cNvPr>
-          <p:cNvSpPr>
-            <a:spLocks noGrp="1"/>
-          </p:cNvSpPr>
-          <p:nvPr/>
-        </p:nvSpPr>
-        <p:spPr>
-          <a:xfrm>
-            <a:off x="4297680" y="3355848"/>
-            <a:ext cx="3566160" cy="1481328"/>
-          </a:xfrm>
-          <a:prstGeom prst="roundRect">
-            <a:avLst>
-              <a:gd name="adj" fmla="val 3704"/>
-            </a:avLst>
-          </a:prstGeom>
-          <a:solidFill>
-            <a:srgbClr val="FAFAF8"/>
-          </a:solidFill>
-          <a:ln w="9525">
-            <a:solidFill>
-              <a:srgbClr val="DAD9D3"/>
-            </a:solidFill>
-            <a:prstDash val="solid"/>
-          </a:ln>
-        </p:spPr>
-      </p:sp>
-      <p:sp>
-        <p:nvSpPr>
-          <p:cNvPr id="25" name="Shape 19">
-            <a:extLst>
-              <a:ext uri="{FF2B5EF4-FFF2-40B4-BE49-F238E27FC236}">
-                <a16:creationId xmlns:a16="http://schemas.microsoft.com/office/drawing/2014/main" id="{A7EED139-60D3-41B9-8B42-40E3695D90D3}"/>
-              </a:ext>
-            </a:extLst>
-          </p:cNvPr>
-          <p:cNvSpPr>
-            <a:spLocks noGrp="1"/>
-          </p:cNvSpPr>
-          <p:nvPr/>
-        </p:nvSpPr>
-        <p:spPr>
-          <a:xfrm>
-            <a:off x="4462272" y="3520440"/>
-            <a:ext cx="502920" cy="502920"/>
-          </a:xfrm>
-          <a:prstGeom prst="ellipse">
-            <a:avLst/>
-          </a:prstGeom>
-          <a:solidFill>
-            <a:srgbClr val="A23B2E"/>
-          </a:solidFill>
-        </p:spPr>
-      </p:sp>
-      <p:pic>
-        <p:nvPicPr>
-          <p:cNvPr id="68" name="Image 4"/>
-          <p:cNvPicPr>
-            <a:picLocks noChangeAspect="1"/>
-          </p:cNvPicPr>
-          <p:nvPr/>
-        </p:nvPicPr>
-        <p:blipFill>
-          <a:blip r:embed="rId7"/>
-          <a:stretch>
-            <a:fillRect/>
-          </a:stretch>
-        </p:blipFill>
-        <p:spPr>
-          <a:xfrm>
-            <a:off x="4527652" y="3585820"/>
-            <a:ext cx="372161" cy="372161"/>
-          </a:xfrm>
-          <a:prstGeom prst="rect">
-            <a:avLst/>
-          </a:prstGeom>
-        </p:spPr>
-      </p:pic>
-      <p:sp>
-        <p:nvSpPr>
-          <p:cNvPr id="27" name="Text 20">
-            <a:extLst>
-              <a:ext uri="{FF2B5EF4-FFF2-40B4-BE49-F238E27FC236}">
-                <a16:creationId xmlns:a16="http://schemas.microsoft.com/office/drawing/2014/main" id="{F6E538E4-F288-4028-B221-25A0D2CA3062}"/>
-              </a:ext>
-            </a:extLst>
-          </p:cNvPr>
-          <p:cNvSpPr>
-            <a:spLocks noGrp="1"/>
-          </p:cNvSpPr>
-          <p:nvPr/>
-        </p:nvSpPr>
-        <p:spPr>
-          <a:xfrm>
-            <a:off x="5074920" y="3483864"/>
-            <a:ext cx="2651760" cy="365760"/>
-          </a:xfrm>
-          <a:prstGeom prst="rect">
-            <a:avLst/>
-          </a:prstGeom>
-          <a:noFill/>
-        </p:spPr>
-        <p:txBody>
-          <a:bodyPr wrap="square" anchor="ctr"/>
-          <a:lstStyle/>
-          <a:p>
-            <a:pPr marL="0" indent="0">
-              <a:buNone/>
-              <a:defRPr sz="1800" i="0">
-                <a:latin typeface="Calibri"/>
-                <a:ea typeface="Calibri"/>
-                <a:cs typeface="Calibri"/>
-              </a:defRPr>
-            </a:pPr>
-            <a:r>
-              <a:rPr sz="1800" b="1" i="0">
-                <a:solidFill>
-                  <a:srgbClr val="1A1A1A"/>
-                </a:solidFill>
-                <a:latin typeface="Calibri"/>
-                <a:ea typeface="Calibri"/>
-                <a:cs typeface="Calibri"/>
-              </a:rPr>
-              <a:t>Unmeasured benefits</a:t>
-            </a:r>
-            <a:endParaRPr sz="1200"/>
-          </a:p>
-        </p:txBody>
-      </p:sp>
-      <p:sp>
-        <p:nvSpPr>
-          <p:cNvPr id="28" name="Text 21">
-            <a:extLst>
-              <a:ext uri="{FF2B5EF4-FFF2-40B4-BE49-F238E27FC236}">
-                <a16:creationId xmlns:a16="http://schemas.microsoft.com/office/drawing/2014/main" id="{360B9382-4401-4EA4-834D-6219B499E482}"/>
-              </a:ext>
-            </a:extLst>
-          </p:cNvPr>
-          <p:cNvSpPr>
-            <a:spLocks noGrp="1"/>
-          </p:cNvSpPr>
-          <p:nvPr/>
-        </p:nvSpPr>
-        <p:spPr>
-          <a:xfrm>
-            <a:off x="5074920" y="3858768"/>
-            <a:ext cx="2651760" cy="868680"/>
-          </a:xfrm>
-          <a:prstGeom prst="rect">
-            <a:avLst/>
-          </a:prstGeom>
-          <a:noFill/>
-        </p:spPr>
-        <p:txBody>
-          <a:bodyPr wrap="square" anchor="ctr"/>
-          <a:lstStyle/>
-          <a:p>
-            <a:pPr marL="0" indent="0">
-              <a:lnSpc>
-                <a:spcPct val="112000"/>
-              </a:lnSpc>
-              <a:buNone/>
-              <a:defRPr sz="1650" i="0">
-                <a:latin typeface="Calibri"/>
-                <a:ea typeface="Calibri"/>
-                <a:cs typeface="Calibri"/>
-              </a:defRPr>
-            </a:pPr>
-            <a:r>
-              <a:rPr sz="1650" i="0">
-                <a:solidFill>
-                  <a:srgbClr val="6B6F6D"/>
-                </a:solidFill>
-                <a:latin typeface="Calibri"/>
-                <a:ea typeface="Calibri"/>
-                <a:cs typeface="Calibri"/>
-              </a:rPr>
-              <a:t>Assessor time, settlement speed, savings and ROI: not measured.</a:t>
-            </a:r>
-            <a:endParaRPr sz="1000"/>
-          </a:p>
-        </p:txBody>
-      </p:sp>
-      <p:sp>
-        <p:nvSpPr>
-          <p:cNvPr id="29" name="Shape 22">
-            <a:extLst>
-              <a:ext uri="{FF2B5EF4-FFF2-40B4-BE49-F238E27FC236}">
-                <a16:creationId xmlns:a16="http://schemas.microsoft.com/office/drawing/2014/main" id="{95DC3531-26C6-4F59-8929-EB00F8DFFDCC}"/>
-              </a:ext>
-            </a:extLst>
-          </p:cNvPr>
-          <p:cNvSpPr>
-            <a:spLocks noGrp="1"/>
-          </p:cNvSpPr>
-          <p:nvPr/>
-        </p:nvSpPr>
-        <p:spPr>
-          <a:xfrm>
-            <a:off x="8046720" y="3355848"/>
-            <a:ext cx="3566160" cy="1481328"/>
-          </a:xfrm>
-          <a:prstGeom prst="roundRect">
-            <a:avLst>
-              <a:gd name="adj" fmla="val 3704"/>
-            </a:avLst>
-          </a:prstGeom>
-          <a:solidFill>
-            <a:srgbClr val="FAFAF8"/>
-          </a:solidFill>
-          <a:ln w="9525">
-            <a:solidFill>
-              <a:srgbClr val="DAD9D3"/>
-            </a:solidFill>
-            <a:prstDash val="solid"/>
-          </a:ln>
-        </p:spPr>
-      </p:sp>
-      <p:sp>
-        <p:nvSpPr>
-          <p:cNvPr id="30" name="Shape 23">
-            <a:extLst>
-              <a:ext uri="{FF2B5EF4-FFF2-40B4-BE49-F238E27FC236}">
-                <a16:creationId xmlns:a16="http://schemas.microsoft.com/office/drawing/2014/main" id="{769195BC-BF64-4BA3-86CD-21CC5E2103AD}"/>
-              </a:ext>
-            </a:extLst>
-          </p:cNvPr>
-          <p:cNvSpPr>
-            <a:spLocks noGrp="1"/>
-          </p:cNvSpPr>
-          <p:nvPr/>
-        </p:nvSpPr>
-        <p:spPr>
-          <a:xfrm>
-            <a:off x="8211312" y="3520440"/>
-            <a:ext cx="502920" cy="502920"/>
-          </a:xfrm>
-          <a:prstGeom prst="ellipse">
-            <a:avLst/>
-          </a:prstGeom>
-          <a:solidFill>
-            <a:srgbClr val="A23B2E"/>
-          </a:solidFill>
-        </p:spPr>
-      </p:sp>
-      <p:pic>
-        <p:nvPicPr>
-          <p:cNvPr id="73" name="Image 5"/>
-          <p:cNvPicPr>
-            <a:picLocks noChangeAspect="1"/>
-          </p:cNvPicPr>
-          <p:nvPr/>
-        </p:nvPicPr>
-        <p:blipFill>
-          <a:blip r:embed="rId8"/>
-          <a:stretch>
-            <a:fillRect/>
-          </a:stretch>
-        </p:blipFill>
-        <p:spPr>
-          <a:xfrm>
-            <a:off x="8276692" y="3585820"/>
-            <a:ext cx="372161" cy="372161"/>
-          </a:xfrm>
-          <a:prstGeom prst="rect">
-            <a:avLst/>
-          </a:prstGeom>
-        </p:spPr>
-      </p:pic>
-      <p:sp>
-        <p:nvSpPr>
-          <p:cNvPr id="32" name="Text 24">
-            <a:extLst>
-              <a:ext uri="{FF2B5EF4-FFF2-40B4-BE49-F238E27FC236}">
-                <a16:creationId xmlns:a16="http://schemas.microsoft.com/office/drawing/2014/main" id="{E99895A9-4697-4C30-B899-5B9636FD5F66}"/>
-              </a:ext>
-            </a:extLst>
-          </p:cNvPr>
-          <p:cNvSpPr>
-            <a:spLocks noGrp="1"/>
-          </p:cNvSpPr>
-          <p:nvPr/>
-        </p:nvSpPr>
-        <p:spPr>
-          <a:xfrm>
-            <a:off x="8823960" y="3483864"/>
-            <a:ext cx="2651760" cy="365760"/>
-          </a:xfrm>
-          <a:prstGeom prst="rect">
-            <a:avLst/>
-          </a:prstGeom>
-          <a:noFill/>
-        </p:spPr>
-        <p:txBody>
-          <a:bodyPr wrap="square" anchor="ctr"/>
-          <a:lstStyle/>
-          <a:p>
-            <a:pPr marL="0" indent="0">
-              <a:buNone/>
-              <a:defRPr sz="1800" i="0">
-                <a:latin typeface="Calibri"/>
-                <a:ea typeface="Calibri"/>
-                <a:cs typeface="Calibri"/>
-              </a:defRPr>
-            </a:pPr>
-            <a:r>
-              <a:rPr sz="1800" b="1" i="0">
-                <a:solidFill>
-                  <a:srgbClr val="1A1A1A"/>
-                </a:solidFill>
-                <a:latin typeface="Calibri"/>
-                <a:ea typeface="Calibri"/>
-                <a:cs typeface="Calibri"/>
-              </a:rPr>
-              <a:t>No live feedback</a:t>
-            </a:r>
-            <a:endParaRPr sz="1200"/>
-          </a:p>
-        </p:txBody>
-      </p:sp>
-      <p:sp>
-        <p:nvSpPr>
-          <p:cNvPr id="33" name="Text 25">
-            <a:extLst>
-              <a:ext uri="{FF2B5EF4-FFF2-40B4-BE49-F238E27FC236}">
-                <a16:creationId xmlns:a16="http://schemas.microsoft.com/office/drawing/2014/main" id="{093E71C3-FE4C-49BD-8EED-6754BCB529CA}"/>
-              </a:ext>
-            </a:extLst>
-          </p:cNvPr>
-          <p:cNvSpPr>
-            <a:spLocks noGrp="1"/>
-          </p:cNvSpPr>
-          <p:nvPr/>
-        </p:nvSpPr>
-        <p:spPr>
-          <a:xfrm>
-            <a:off x="8823960" y="3858768"/>
-            <a:ext cx="2651760" cy="868680"/>
-          </a:xfrm>
-          <a:prstGeom prst="rect">
-            <a:avLst/>
-          </a:prstGeom>
-          <a:noFill/>
-        </p:spPr>
-        <p:txBody>
-          <a:bodyPr wrap="square" anchor="ctr"/>
-          <a:lstStyle/>
-          <a:p>
-            <a:pPr marL="0" indent="0">
-              <a:lnSpc>
-                <a:spcPct val="112000"/>
-              </a:lnSpc>
-              <a:buNone/>
-              <a:defRPr sz="1650" i="0">
-                <a:latin typeface="Calibri"/>
-                <a:ea typeface="Calibri"/>
-                <a:cs typeface="Calibri"/>
-              </a:defRPr>
-            </a:pPr>
-            <a:r>
-              <a:rPr sz="1650" i="0">
-                <a:solidFill>
-                  <a:srgbClr val="6B6F6D"/>
-                </a:solidFill>
-                <a:latin typeface="Calibri"/>
-                <a:ea typeface="Calibri"/>
-                <a:cs typeface="Calibri"/>
-              </a:rPr>
-              <a:t>Appeals and error correction remain to be implemented.</a:t>
-            </a:r>
-            <a:endParaRPr sz="1000"/>
+              <a:t>Fallback contexts received substantially less priority access.</a:t>
+            </a:r>
+            <a:endParaRPr sz="1000" dirty="0"/>
           </a:p>
         </p:txBody>
       </p:sp>
@@ -14225,7 +13923,7 @@
               </a:defRPr>
             </a:pPr>
             <a:r>
-              <a:rPr sz="1875" b="1" i="0">
+              <a:rPr sz="1875" b="1" i="0" dirty="0">
                 <a:solidFill>
                   <a:srgbClr val="1E4438"/>
                 </a:solidFill>
@@ -14233,9 +13931,31 @@
                 <a:ea typeface="Calibri"/>
                 <a:cs typeface="Calibri"/>
               </a:rPr>
-              <a:t>Contribution: an integrated pipeline and controlled prioritisation study.</a:t>
-            </a:r>
-            <a:endParaRPr sz="1300"/>
+              <a:t>Contribution: an integrated pipeline and controlled </a:t>
+            </a:r>
+            <a:r>
+              <a:rPr sz="1875" b="1" i="0" dirty="0" err="1">
+                <a:solidFill>
+                  <a:srgbClr val="1E4438"/>
+                </a:solidFill>
+                <a:latin typeface="Calibri"/>
+                <a:ea typeface="Calibri"/>
+                <a:cs typeface="Calibri"/>
+              </a:rPr>
+              <a:t>prioritisation</a:t>
+            </a:r>
+            <a:r>
+              <a:rPr sz="1875" b="1" i="0" dirty="0">
+                <a:solidFill>
+                  <a:srgbClr val="1E4438"/>
+                </a:solidFill>
+                <a:latin typeface="Calibri"/>
+                <a:ea typeface="Calibri"/>
+                <a:cs typeface="Calibri"/>
+              </a:rPr>
+              <a:t> study.</a:t>
+            </a:r>
+            <a:endParaRPr sz="1300" dirty="0"/>
           </a:p>
           <a:p>
             <a:pPr marL="0" indent="0">
@@ -14247,7 +13967,7 @@
               </a:defRPr>
             </a:pPr>
             <a:r>
-              <a:rPr sz="1875" b="1" i="0">
+              <a:rPr sz="1875" b="1" i="0" dirty="0">
                 <a:solidFill>
                   <a:srgbClr val="1E4438"/>
                 </a:solidFill>
@@ -14257,7 +13977,7 @@
               </a:rPr>
               <a:t>Real-world effectiveness still requires supervised validation.</a:t>
             </a:r>
-            <a:endParaRPr sz="1300"/>
+            <a:endParaRPr sz="1300" dirty="0"/>
           </a:p>
         </p:txBody>
       </p:sp>
